--- a/INVESTOR_ONE_PAGER.pptx
+++ b/INVESTOR_ONE_PAGER.pptx
@@ -4287,7 +4287,7 @@
                 </a:solidFill>
                 <a:latin typeface="Calibri"/>
               </a:rPr>
-              <a:t>23%</a:t>
+              <a:t>100s</a:t>
             </a:r>
           </a:p>
         </p:txBody>
@@ -4322,7 +4322,7 @@
                 </a:solidFill>
                 <a:latin typeface="Calibri"/>
               </a:rPr>
-              <a:t>of new deployments</a:t>
+              <a:t>of incorrect invoices per day</a:t>
             </a:r>
           </a:p>
         </p:txBody>
@@ -4357,7 +4357,7 @@
                 </a:solidFill>
                 <a:latin typeface="Calibri"/>
               </a:rPr>
-              <a:t>report billing or connectivity defects within 30 days of go-live</a:t>
+              <a:t>from a single billing defect across just 100 stations</a:t>
             </a:r>
           </a:p>
         </p:txBody>
